--- a/dist/초6/영어/의사소통/초6_영어_의사소통_01_뜻확인하기.pptx
+++ b/dist/초6/영어/의사소통/초6_영어_의사소통_01_뜻확인하기.pptx
@@ -121,13 +121,13 @@
   <p:extLst>
     <p:ext uri="{521415D9-36F7-43E2-AB2F-B90AF26B5E84}">
       <p14:sectionLst xmlns:p14="http://schemas.microsoft.com/office/powerpoint/2010/main">
-        <p14:section name="도입" id="{4692916d-452a-4463-ebcc-51d48bdd927e}">
+        <p14:section name="도입" id="{dd0bfc1c-9f45-5fc8-952e-36ad63b7a651}">
           <p14:sldIdLst>
             <p14:sldId id="256"/>
             <p14:sldId id="257"/>
           </p14:sldIdLst>
         </p14:section>
-        <p14:section name="개념" id="{dcf77204-ecba-098e-d9a0-e32b41e0b34f}">
+        <p14:section name="개념" id="{3e0cfe46-8950-1703-4781-87dbadd7d5ef}">
           <p14:sldIdLst>
             <p14:sldId id="258"/>
             <p14:sldId id="259"/>
@@ -135,7 +135,7 @@
             <p14:sldId id="261"/>
           </p14:sldIdLst>
         </p14:section>
-        <p14:section name="연습" id="{5dc42c89-4542-6643-9f82-84677c574608}">
+        <p14:section name="연습" id="{e647d7f2-63d9-b28f-07a8-eaceb7e16c57}">
           <p14:sldIdLst>
             <p14:sldId id="262"/>
             <p14:sldId id="263"/>
@@ -143,19 +143,19 @@
             <p14:sldId id="265"/>
           </p14:sldIdLst>
         </p14:section>
-        <p14:section name="확인" id="{ec9718e0-c52f-8812-382c-6458fc67d172}">
+        <p14:section name="확인" id="{832bd026-4974-fe48-ce41-8a12ad133e60}">
           <p14:sldIdLst>
             <p14:sldId id="266"/>
             <p14:sldId id="267"/>
             <p14:sldId id="268"/>
           </p14:sldIdLst>
         </p14:section>
-        <p14:section name="정리" id="{03305688-5d78-7728-16d3-785ea6f9d2d9}">
+        <p14:section name="정리" id="{ab286198-9b76-6b1b-26cb-226122266bf3}">
           <p14:sldIdLst>
             <p14:sldId id="269"/>
           </p14:sldIdLst>
         </p14:section>
-        <p14:section name="보충" id="{69ef0ec2-75d8-6015-440e-038effe6e6e6}">
+        <p14:section name="보충" id="{2617a83b-dc9c-0a0c-9d0f-d81398e288fe}">
           <p14:sldIdLst>
             <p14:sldId id="270"/>
           </p14:sldIdLst>

--- a/dist/초6/영어/의사소통/초6_영어_의사소통_01_뜻확인하기.pptx
+++ b/dist/초6/영어/의사소통/초6_영어_의사소통_01_뜻확인하기.pptx
@@ -121,13 +121,13 @@
   <p:extLst>
     <p:ext uri="{521415D9-36F7-43E2-AB2F-B90AF26B5E84}">
       <p14:sectionLst xmlns:p14="http://schemas.microsoft.com/office/powerpoint/2010/main">
-        <p14:section name="도입" id="{dd0bfc1c-9f45-5fc8-952e-36ad63b7a651}">
+        <p14:section name="도입" id="{380c077a-11d5-f4f6-4b9d-210bd1515c7d}">
           <p14:sldIdLst>
             <p14:sldId id="256"/>
             <p14:sldId id="257"/>
           </p14:sldIdLst>
         </p14:section>
-        <p14:section name="개념" id="{3e0cfe46-8950-1703-4781-87dbadd7d5ef}">
+        <p14:section name="개념" id="{f594d51a-9a07-ed4a-1a99-f7618f61e24f}">
           <p14:sldIdLst>
             <p14:sldId id="258"/>
             <p14:sldId id="259"/>
@@ -135,7 +135,7 @@
             <p14:sldId id="261"/>
           </p14:sldIdLst>
         </p14:section>
-        <p14:section name="연습" id="{e647d7f2-63d9-b28f-07a8-eaceb7e16c57}">
+        <p14:section name="연습" id="{6f2f5f38-fd13-592e-aef3-c106a0025e87}">
           <p14:sldIdLst>
             <p14:sldId id="262"/>
             <p14:sldId id="263"/>
@@ -143,19 +143,19 @@
             <p14:sldId id="265"/>
           </p14:sldIdLst>
         </p14:section>
-        <p14:section name="확인" id="{832bd026-4974-fe48-ce41-8a12ad133e60}">
+        <p14:section name="확인" id="{65e25a2d-66e1-8f50-d9ce-146de5e5f9b6}">
           <p14:sldIdLst>
             <p14:sldId id="266"/>
             <p14:sldId id="267"/>
             <p14:sldId id="268"/>
           </p14:sldIdLst>
         </p14:section>
-        <p14:section name="정리" id="{ab286198-9b76-6b1b-26cb-226122266bf3}">
+        <p14:section name="정리" id="{a82b4285-a53e-6f31-5bba-ef9ebe2b4de2}">
           <p14:sldIdLst>
             <p14:sldId id="269"/>
           </p14:sldIdLst>
         </p14:section>
-        <p14:section name="보충" id="{2617a83b-dc9c-0a0c-9d0f-d81398e288fe}">
+        <p14:section name="보충" id="{d7f1d5a6-f7b8-be68-6381-3e86b97ee143}">
           <p14:sldIdLst>
             <p14:sldId id="270"/>
           </p14:sldIdLst>
@@ -1177,7 +1177,7 @@
 막히면
 - 헷갈리는 글자(G와 J, E와 I, B와 V 등)만 골라 여러 번 짚게 합니다.
 주의
-- 이 차시는 계획상 앞 차시가 없습니다. 보충 뒤에도 알파벳 이름을 많이 헷갈리면 3학년 ‘알파벳 A부터 M까지’(KR22-G03-ENG-ABC1-L01)와 ‘알파벳 N부터 Z까지’(KR22-G03-ENG-ABC2-L01)를 먼저 다시 하고 이 차시를 시작합니다.</a:t>
+- 보충 뒤에도 알파벳 이름을 많이 헷갈리면 3학년 ‘알파벳 A부터 M까지’(KR22-G03-ENG-ABC1-L01)와 ‘알파벳 N부터 Z까지’(KR22-G03-ENG-ABC2-L01)를 먼저 다시 하고 이 차시를 시작합니다.</a:t>
             </a:r>
             <a:endParaRPr lang="en-US" dirty="0"/>
           </a:p>
@@ -1266,7 +1266,7 @@
             <a:r>
               <a:rPr lang="en-US" dirty="0"/>
               <a:t>[S02 · 선수 학습 확인(알파벳 이름)]
-목적: 철자를 묻고 답하려면 알파벳 이름을 알아야 합니다. 낱말의 철자를 알파벳 이름으로 말하고, 들은 이름으로 낱말을 알아내는지 확인합니다. 이 차시는 계획상 앞 차시가 없으므로 3학년 알파벳 차시의 내용을 확인합니다.
+목적: 철자를 묻고 답하려면 알파벳 이름을 알아야 합니다. 낱말의 철자를 알파벳 이름으로 말하고, 들은 이름으로 낱말을 알아내는지 확인합니다. 앞 차시인 3학년 알파벳 차시의 내용을 확인합니다.
 시간: 약 3분
 이렇게 말해 보세요
 - “①, desk의 철자를 알파벳 이름으로 한 글자씩 말해 줄래?”
